--- a/classes/parte-13-seguridad-movil-iot-e-inalambrica/271-seguridad-de-bluetooth-y-ble/clase-271-presentacion.pptx
+++ b/classes/parte-13-seguridad-movil-iot-e-inalambrica/271-seguridad-de-bluetooth-y-ble/clase-271-presentacion.pptx
@@ -17,6 +17,10 @@
     <p:sldId id="265" r:id="rId16"/>
     <p:sldId id="266" r:id="rId17"/>
     <p:sldId id="267" r:id="rId18"/>
+    <p:sldId id="268" r:id="rId19"/>
+    <p:sldId id="269" r:id="rId20"/>
+    <p:sldId id="270" r:id="rId21"/>
+    <p:sldId id="271" r:id="rId22"/>
   </p:sldIdLst>
   <p:sldSz cx="9144000" cy="6858000" type="screen4x3"/>
   <p:notesSz cx="6858000" cy="9144000"/>
@@ -3198,7 +3202,7 @@
                   <a:srgbClr val="0B3D2E"/>
                 </a:solidFill>
               </a:rPr>
-              <a:t>⚠️ Errores comunes</a:t>
+              <a:t>🧪 Laboratorio guiado</a:t>
             </a:r>
           </a:p>
         </p:txBody>
@@ -3236,67 +3240,97 @@
                   <a:srgbClr val="22282E"/>
                 </a:solidFill>
               </a:rPr>
-              <a:t>•  No aparece en el escaneo — No está en modo advertising; despiértalo o acércalo</a:t>
-            </a:r>
-          </a:p>
-          <a:p>
-            <a:pPr>
-              <a:spcAft>
-                <a:spcPts val="600"/>
-              </a:spcAft>
-            </a:pPr>
-            <a:r>
-              <a:rPr sz="1500">
-                <a:solidFill>
-                  <a:srgbClr val="22282E"/>
-                </a:solidFill>
-              </a:rPr>
-              <a:t>•  gatttool no conecta — La app oficial lo tiene conectado; ciérrala y reintenta</a:t>
-            </a:r>
-          </a:p>
-          <a:p>
-            <a:pPr>
-              <a:spcAft>
-                <a:spcPts val="600"/>
-              </a:spcAft>
-            </a:pPr>
-            <a:r>
-              <a:rPr sz="1500">
-                <a:solidFill>
-                  <a:srgbClr val="22282E"/>
-                </a:solidFill>
-              </a:rPr>
-              <a:t>•  Escritura sin efecto — Handle equivocado o requiere formato/valor concreto; revisa propiedades</a:t>
-            </a:r>
-          </a:p>
-          <a:p>
-            <a:pPr>
-              <a:spcAft>
-                <a:spcPts val="600"/>
-              </a:spcAft>
-            </a:pPr>
-            <a:r>
-              <a:rPr sz="1500">
-                <a:solidFill>
-                  <a:srgbClr val="22282E"/>
-                </a:solidFill>
-              </a:rPr>
-              <a:t>•  Sniffer no captura la conexión — Perdió el evento de conexión; reinicia el sniffer antes de conectar</a:t>
-            </a:r>
-          </a:p>
-          <a:p>
-            <a:pPr>
-              <a:spcAft>
-                <a:spcPts val="600"/>
-              </a:spcAft>
-            </a:pPr>
-            <a:r>
-              <a:rPr sz="1500">
-                <a:solidFill>
-                  <a:srgbClr val="22282E"/>
-                </a:solidFill>
-              </a:rPr>
-              <a:t>•  Tráfico ilegible en Wireshark — Enlace cifrado; necesitas la LTK o capturar el emparejamiento</a:t>
+              <a:t>•  Escanea con bluetoothctl scan on o bettercap ble.recon on y localiza tu dispositivo BLE propio.</a:t>
+            </a:r>
+          </a:p>
+          <a:p>
+            <a:pPr>
+              <a:spcAft>
+                <a:spcPts val="600"/>
+              </a:spcAft>
+            </a:pPr>
+            <a:r>
+              <a:rPr sz="1500">
+                <a:solidFill>
+                  <a:srgbClr val="22282E"/>
+                </a:solidFill>
+              </a:rPr>
+              <a:t>•  Enumera GATT: con gatttool o nRF Connect lista servicios y características, anotando handles, UUID y propiedades (read/write/notify).</a:t>
+            </a:r>
+          </a:p>
+          <a:p>
+            <a:pPr>
+              <a:spcAft>
+                <a:spcPts val="600"/>
+              </a:spcAft>
+            </a:pPr>
+            <a:r>
+              <a:rPr sz="1500">
+                <a:solidFill>
+                  <a:srgbClr val="22282E"/>
+                </a:solidFill>
+              </a:rPr>
+              <a:t>•  Lee valores: lee características legibles y correlaciona con el estado del dispositivo (p. ej. nivel de batería).</a:t>
+            </a:r>
+          </a:p>
+          <a:p>
+            <a:pPr>
+              <a:spcAft>
+                <a:spcPts val="600"/>
+              </a:spcAft>
+            </a:pPr>
+            <a:r>
+              <a:rPr sz="1500">
+                <a:solidFill>
+                  <a:srgbClr val="22282E"/>
+                </a:solidFill>
+              </a:rPr>
+              <a:t>•  Escribe valores: en tu dispositivo propio, escribe una característica de control y observa el efecto (encender/apagar, cambiar color).</a:t>
+            </a:r>
+          </a:p>
+          <a:p>
+            <a:pPr>
+              <a:spcAft>
+                <a:spcPts val="600"/>
+              </a:spcAft>
+            </a:pPr>
+            <a:r>
+              <a:rPr sz="1500">
+                <a:solidFill>
+                  <a:srgbClr val="22282E"/>
+                </a:solidFill>
+              </a:rPr>
+              <a:t>•  Habilita notificaciones: suscríbete a una característica notify y captura los eventos.</a:t>
+            </a:r>
+          </a:p>
+          <a:p>
+            <a:pPr>
+              <a:spcAft>
+                <a:spcPts val="600"/>
+              </a:spcAft>
+            </a:pPr>
+            <a:r>
+              <a:rPr sz="1500">
+                <a:solidFill>
+                  <a:srgbClr val="22282E"/>
+                </a:solidFill>
+              </a:rPr>
+              <a:t>•  Sniff: con el nRF52840/Ubertooth captura una conexión y ábrela en Wireshark; comprueba si el enlace está cifrado.</a:t>
+            </a:r>
+          </a:p>
+          <a:p>
+            <a:pPr>
+              <a:spcAft>
+                <a:spcPts val="600"/>
+              </a:spcAft>
+            </a:pPr>
+            <a:r>
+              <a:rPr sz="1500">
+                <a:solidFill>
+                  <a:srgbClr val="22282E"/>
+                </a:solidFill>
+              </a:rPr>
+              <a:t>•  Replay: si el dispositivo acepta comandos sin autenticación, reproduce una escritura capturada para demostrar el impacto.</a:t>
             </a:r>
           </a:p>
         </p:txBody>
@@ -3347,7 +3381,7 @@
                   <a:srgbClr val="0B3D2E"/>
                 </a:solidFill>
               </a:rPr>
-              <a:t>❓ Preguntas frecuentes</a:t>
+              <a:t>✍️ Ejercicios</a:t>
             </a:r>
           </a:p>
         </p:txBody>
@@ -3385,82 +3419,82 @@
                   <a:srgbClr val="22282E"/>
                 </a:solidFill>
               </a:rPr>
-              <a:t>•  ❓ ¿Puedo interceptar cualquier tráfico BLE?</a:t>
-            </a:r>
-          </a:p>
-          <a:p>
-            <a:pPr>
-              <a:spcAft>
-                <a:spcPts val="600"/>
-              </a:spcAft>
-            </a:pPr>
-            <a:r>
-              <a:rPr sz="1500">
-                <a:solidFill>
-                  <a:srgbClr val="22282E"/>
-                </a:solidFill>
-              </a:rPr>
-              <a:t>•  Solo si capturas el emparejamiento o el enlace no está cifrado. Con Just Works y sin cifrado adicional, el tráfico suele ser legible; con emparejamiento seguro necesitas la clave.</a:t>
-            </a:r>
-          </a:p>
-          <a:p>
-            <a:pPr>
-              <a:spcAft>
-                <a:spcPts val="600"/>
-              </a:spcAft>
-            </a:pPr>
-            <a:r>
-              <a:rPr sz="1500">
-                <a:solidFill>
-                  <a:srgbClr val="22282E"/>
-                </a:solidFill>
-              </a:rPr>
-              <a:t>•  ❓ ¿Por qué tantos dispositivos BLE son inseguros?</a:t>
-            </a:r>
-          </a:p>
-          <a:p>
-            <a:pPr>
-              <a:spcAft>
-                <a:spcPts val="600"/>
-              </a:spcAft>
-            </a:pPr>
-            <a:r>
-              <a:rPr sz="1500">
-                <a:solidFill>
-                  <a:srgbClr val="22282E"/>
-                </a:solidFill>
-              </a:rPr>
-              <a:t>•  Muchos usan Just Works sin autenticación y confían en que la app sea el único cliente, sin autorizar comandos a nivel GATT: cualquier central puede escribir sus características.</a:t>
-            </a:r>
-          </a:p>
-          <a:p>
-            <a:pPr>
-              <a:spcAft>
-                <a:spcPts val="600"/>
-              </a:spcAft>
-            </a:pPr>
-            <a:r>
-              <a:rPr sz="1500">
-                <a:solidFill>
-                  <a:srgbClr val="22282E"/>
-                </a:solidFill>
-              </a:rPr>
-              <a:t>•  ❓ ¿Sirve un dongle barato para empezar?</a:t>
-            </a:r>
-          </a:p>
-          <a:p>
-            <a:pPr>
-              <a:spcAft>
-                <a:spcPts val="600"/>
-              </a:spcAft>
-            </a:pPr>
-            <a:r>
-              <a:rPr sz="1500">
-                <a:solidFill>
-                  <a:srgbClr val="22282E"/>
-                </a:solidFill>
-              </a:rPr>
-              <a:t>•  Para escanear e interactuar sí. Para sniffear conexiones necesitas hardware específico como el nRF52840 o Ubertooth One.</a:t>
+              <a:t>•  Enumera todos los servicios y características de un dispositivo BLE propio.</a:t>
+            </a:r>
+          </a:p>
+          <a:p>
+            <a:pPr>
+              <a:spcAft>
+                <a:spcPts val="600"/>
+              </a:spcAft>
+            </a:pPr>
+            <a:r>
+              <a:rPr sz="1500">
+                <a:solidFill>
+                  <a:srgbClr val="22282E"/>
+                </a:solidFill>
+              </a:rPr>
+              <a:t>•  Identifica qué característica controla una función concreta.</a:t>
+            </a:r>
+          </a:p>
+          <a:p>
+            <a:pPr>
+              <a:spcAft>
+                <a:spcPts val="600"/>
+              </a:spcAft>
+            </a:pPr>
+            <a:r>
+              <a:rPr sz="1500">
+                <a:solidFill>
+                  <a:srgbClr val="22282E"/>
+                </a:solidFill>
+              </a:rPr>
+              <a:t>•  Cambia el estado del dispositivo escribiendo una característica.</a:t>
+            </a:r>
+          </a:p>
+          <a:p>
+            <a:pPr>
+              <a:spcAft>
+                <a:spcPts val="600"/>
+              </a:spcAft>
+            </a:pPr>
+            <a:r>
+              <a:rPr sz="1500">
+                <a:solidFill>
+                  <a:srgbClr val="22282E"/>
+                </a:solidFill>
+              </a:rPr>
+              <a:t>•  Captura tráfico BLE y determina si el emparejamiento usa Just Works.</a:t>
+            </a:r>
+          </a:p>
+          <a:p>
+            <a:pPr>
+              <a:spcAft>
+                <a:spcPts val="600"/>
+              </a:spcAft>
+            </a:pPr>
+            <a:r>
+              <a:rPr sz="1500">
+                <a:solidFill>
+                  <a:srgbClr val="22282E"/>
+                </a:solidFill>
+              </a:rPr>
+              <a:t>•  Suscríbete a notificaciones y registra tres eventos.</a:t>
+            </a:r>
+          </a:p>
+          <a:p>
+            <a:pPr>
+              <a:spcAft>
+                <a:spcPts val="600"/>
+              </a:spcAft>
+            </a:pPr>
+            <a:r>
+              <a:rPr sz="1500">
+                <a:solidFill>
+                  <a:srgbClr val="22282E"/>
+                </a:solidFill>
+              </a:rPr>
+              <a:t>•  Enumera las debilidades del dispositivo (falta de cifrado/autorización).</a:t>
             </a:r>
           </a:p>
         </p:txBody>
@@ -3511,7 +3545,7 @@
                   <a:srgbClr val="0B3D2E"/>
                 </a:solidFill>
               </a:rPr>
-              <a:t>🔗 Referencias</a:t>
+              <a:t>📝 Reto verificable</a:t>
             </a:r>
           </a:p>
         </p:txBody>
@@ -3549,6 +3583,408 @@
                   <a:srgbClr val="22282E"/>
                 </a:solidFill>
               </a:rPr>
+              <a:t>•  Toma un dispositivo BLE propio (p. ej. una bombilla o candado de juguete) y demuestra control no autenticado: identifica la característica de control y modifícala para cambiar su estado sin usar la…</a:t>
+            </a:r>
+          </a:p>
+        </p:txBody>
+      </p:sp>
+    </p:spTree>
+  </p:cSld>
+  <p:clrMapOvr>
+    <a:masterClrMapping/>
+  </p:clrMapOvr>
+</p:sld>
+</file>
+
+<file path=ppt/slides/slide13.xml><?xml version="1.0" encoding="utf-8"?>
+<p:sld xmlns:a="http://schemas.openxmlformats.org/drawingml/2006/main" xmlns:p="http://schemas.openxmlformats.org/presentationml/2006/main" xmlns:r="http://schemas.openxmlformats.org/officeDocument/2006/relationships">
+  <p:cSld>
+    <p:spTree>
+      <p:nvGrpSpPr>
+        <p:cNvPr id="1" name=""/>
+        <p:cNvGrpSpPr/>
+        <p:nvPr/>
+      </p:nvGrpSpPr>
+      <p:grpSpPr/>
+      <p:sp>
+        <p:nvSpPr>
+          <p:cNvPr id="2" name="TextBox 1"/>
+          <p:cNvSpPr txBox="1"/>
+          <p:nvPr/>
+        </p:nvSpPr>
+        <p:spPr>
+          <a:xfrm>
+            <a:off x="457200" y="320040"/>
+            <a:ext cx="8229600" cy="822960"/>
+          </a:xfrm>
+          <a:prstGeom prst="rect">
+            <a:avLst/>
+          </a:prstGeom>
+          <a:noFill/>
+        </p:spPr>
+        <p:txBody>
+          <a:bodyPr wrap="square">
+            <a:spAutoFit/>
+          </a:bodyPr>
+          <a:lstStyle/>
+          <a:p>
+            <a:r>
+              <a:rPr sz="2600" b="1">
+                <a:solidFill>
+                  <a:srgbClr val="0B3D2E"/>
+                </a:solidFill>
+              </a:rPr>
+              <a:t>⚠️ Errores comunes</a:t>
+            </a:r>
+          </a:p>
+        </p:txBody>
+      </p:sp>
+      <p:sp>
+        <p:nvSpPr>
+          <p:cNvPr id="3" name="TextBox 2"/>
+          <p:cNvSpPr txBox="1"/>
+          <p:nvPr/>
+        </p:nvSpPr>
+        <p:spPr>
+          <a:xfrm>
+            <a:off x="457200" y="1280160"/>
+            <a:ext cx="8229600" cy="4937760"/>
+          </a:xfrm>
+          <a:prstGeom prst="rect">
+            <a:avLst/>
+          </a:prstGeom>
+          <a:noFill/>
+        </p:spPr>
+        <p:txBody>
+          <a:bodyPr wrap="square">
+            <a:spAutoFit/>
+          </a:bodyPr>
+          <a:lstStyle/>
+          <a:p>
+            <a:pPr>
+              <a:spcAft>
+                <a:spcPts val="600"/>
+              </a:spcAft>
+            </a:pPr>
+            <a:r>
+              <a:rPr sz="1500">
+                <a:solidFill>
+                  <a:srgbClr val="22282E"/>
+                </a:solidFill>
+              </a:rPr>
+              <a:t>•  No aparece en el escaneo — No está en modo advertising; despiértalo o acércalo</a:t>
+            </a:r>
+          </a:p>
+          <a:p>
+            <a:pPr>
+              <a:spcAft>
+                <a:spcPts val="600"/>
+              </a:spcAft>
+            </a:pPr>
+            <a:r>
+              <a:rPr sz="1500">
+                <a:solidFill>
+                  <a:srgbClr val="22282E"/>
+                </a:solidFill>
+              </a:rPr>
+              <a:t>•  gatttool no conecta — La app oficial lo tiene conectado; ciérrala y reintenta</a:t>
+            </a:r>
+          </a:p>
+          <a:p>
+            <a:pPr>
+              <a:spcAft>
+                <a:spcPts val="600"/>
+              </a:spcAft>
+            </a:pPr>
+            <a:r>
+              <a:rPr sz="1500">
+                <a:solidFill>
+                  <a:srgbClr val="22282E"/>
+                </a:solidFill>
+              </a:rPr>
+              <a:t>•  Escritura sin efecto — Handle equivocado o requiere formato/valor concreto; revisa propiedades</a:t>
+            </a:r>
+          </a:p>
+          <a:p>
+            <a:pPr>
+              <a:spcAft>
+                <a:spcPts val="600"/>
+              </a:spcAft>
+            </a:pPr>
+            <a:r>
+              <a:rPr sz="1500">
+                <a:solidFill>
+                  <a:srgbClr val="22282E"/>
+                </a:solidFill>
+              </a:rPr>
+              <a:t>•  Sniffer no captura la conexión — Perdió el evento de conexión; reinicia el sniffer antes de conectar</a:t>
+            </a:r>
+          </a:p>
+          <a:p>
+            <a:pPr>
+              <a:spcAft>
+                <a:spcPts val="600"/>
+              </a:spcAft>
+            </a:pPr>
+            <a:r>
+              <a:rPr sz="1500">
+                <a:solidFill>
+                  <a:srgbClr val="22282E"/>
+                </a:solidFill>
+              </a:rPr>
+              <a:t>•  Tráfico ilegible en Wireshark — Enlace cifrado; necesitas la LTK o capturar el emparejamiento</a:t>
+            </a:r>
+          </a:p>
+        </p:txBody>
+      </p:sp>
+    </p:spTree>
+  </p:cSld>
+  <p:clrMapOvr>
+    <a:masterClrMapping/>
+  </p:clrMapOvr>
+</p:sld>
+</file>
+
+<file path=ppt/slides/slide14.xml><?xml version="1.0" encoding="utf-8"?>
+<p:sld xmlns:a="http://schemas.openxmlformats.org/drawingml/2006/main" xmlns:p="http://schemas.openxmlformats.org/presentationml/2006/main" xmlns:r="http://schemas.openxmlformats.org/officeDocument/2006/relationships">
+  <p:cSld>
+    <p:spTree>
+      <p:nvGrpSpPr>
+        <p:cNvPr id="1" name=""/>
+        <p:cNvGrpSpPr/>
+        <p:nvPr/>
+      </p:nvGrpSpPr>
+      <p:grpSpPr/>
+      <p:sp>
+        <p:nvSpPr>
+          <p:cNvPr id="2" name="TextBox 1"/>
+          <p:cNvSpPr txBox="1"/>
+          <p:nvPr/>
+        </p:nvSpPr>
+        <p:spPr>
+          <a:xfrm>
+            <a:off x="457200" y="320040"/>
+            <a:ext cx="8229600" cy="822960"/>
+          </a:xfrm>
+          <a:prstGeom prst="rect">
+            <a:avLst/>
+          </a:prstGeom>
+          <a:noFill/>
+        </p:spPr>
+        <p:txBody>
+          <a:bodyPr wrap="square">
+            <a:spAutoFit/>
+          </a:bodyPr>
+          <a:lstStyle/>
+          <a:p>
+            <a:r>
+              <a:rPr sz="2600" b="1">
+                <a:solidFill>
+                  <a:srgbClr val="0B3D2E"/>
+                </a:solidFill>
+              </a:rPr>
+              <a:t>❓ Preguntas frecuentes</a:t>
+            </a:r>
+          </a:p>
+        </p:txBody>
+      </p:sp>
+      <p:sp>
+        <p:nvSpPr>
+          <p:cNvPr id="3" name="TextBox 2"/>
+          <p:cNvSpPr txBox="1"/>
+          <p:nvPr/>
+        </p:nvSpPr>
+        <p:spPr>
+          <a:xfrm>
+            <a:off x="457200" y="1280160"/>
+            <a:ext cx="8229600" cy="4937760"/>
+          </a:xfrm>
+          <a:prstGeom prst="rect">
+            <a:avLst/>
+          </a:prstGeom>
+          <a:noFill/>
+        </p:spPr>
+        <p:txBody>
+          <a:bodyPr wrap="square">
+            <a:spAutoFit/>
+          </a:bodyPr>
+          <a:lstStyle/>
+          <a:p>
+            <a:pPr>
+              <a:spcAft>
+                <a:spcPts val="600"/>
+              </a:spcAft>
+            </a:pPr>
+            <a:r>
+              <a:rPr sz="1500">
+                <a:solidFill>
+                  <a:srgbClr val="22282E"/>
+                </a:solidFill>
+              </a:rPr>
+              <a:t>•  ❓ ¿Puedo interceptar cualquier tráfico BLE?</a:t>
+            </a:r>
+          </a:p>
+          <a:p>
+            <a:pPr>
+              <a:spcAft>
+                <a:spcPts val="600"/>
+              </a:spcAft>
+            </a:pPr>
+            <a:r>
+              <a:rPr sz="1500">
+                <a:solidFill>
+                  <a:srgbClr val="22282E"/>
+                </a:solidFill>
+              </a:rPr>
+              <a:t>•  Solo si capturas el emparejamiento o el enlace no está cifrado. Con Just Works y sin cifrado adicional, el tráfico suele ser legible; con emparejamiento seguro necesitas la clave.</a:t>
+            </a:r>
+          </a:p>
+          <a:p>
+            <a:pPr>
+              <a:spcAft>
+                <a:spcPts val="600"/>
+              </a:spcAft>
+            </a:pPr>
+            <a:r>
+              <a:rPr sz="1500">
+                <a:solidFill>
+                  <a:srgbClr val="22282E"/>
+                </a:solidFill>
+              </a:rPr>
+              <a:t>•  ❓ ¿Por qué tantos dispositivos BLE son inseguros?</a:t>
+            </a:r>
+          </a:p>
+          <a:p>
+            <a:pPr>
+              <a:spcAft>
+                <a:spcPts val="600"/>
+              </a:spcAft>
+            </a:pPr>
+            <a:r>
+              <a:rPr sz="1500">
+                <a:solidFill>
+                  <a:srgbClr val="22282E"/>
+                </a:solidFill>
+              </a:rPr>
+              <a:t>•  Algunos productos usan Just Works y confían demasiado en que solo la app oficial actuará como cliente. Si una característica sensible carece además de permisos de enlace y autorización de aplicación…</a:t>
+            </a:r>
+          </a:p>
+          <a:p>
+            <a:pPr>
+              <a:spcAft>
+                <a:spcPts val="600"/>
+              </a:spcAft>
+            </a:pPr>
+            <a:r>
+              <a:rPr sz="1500">
+                <a:solidFill>
+                  <a:srgbClr val="22282E"/>
+                </a:solidFill>
+              </a:rPr>
+              <a:t>•  ❓ ¿Sirve un dongle barato para empezar?</a:t>
+            </a:r>
+          </a:p>
+          <a:p>
+            <a:pPr>
+              <a:spcAft>
+                <a:spcPts val="600"/>
+              </a:spcAft>
+            </a:pPr>
+            <a:r>
+              <a:rPr sz="1500">
+                <a:solidFill>
+                  <a:srgbClr val="22282E"/>
+                </a:solidFill>
+              </a:rPr>
+              <a:t>•  Para escanear e interactuar sí. Para sniffear conexiones necesitas hardware específico como el nRF52840 o Ubertooth One.</a:t>
+            </a:r>
+          </a:p>
+        </p:txBody>
+      </p:sp>
+    </p:spTree>
+  </p:cSld>
+  <p:clrMapOvr>
+    <a:masterClrMapping/>
+  </p:clrMapOvr>
+</p:sld>
+</file>
+
+<file path=ppt/slides/slide15.xml><?xml version="1.0" encoding="utf-8"?>
+<p:sld xmlns:a="http://schemas.openxmlformats.org/drawingml/2006/main" xmlns:p="http://schemas.openxmlformats.org/presentationml/2006/main" xmlns:r="http://schemas.openxmlformats.org/officeDocument/2006/relationships">
+  <p:cSld>
+    <p:spTree>
+      <p:nvGrpSpPr>
+        <p:cNvPr id="1" name=""/>
+        <p:cNvGrpSpPr/>
+        <p:nvPr/>
+      </p:nvGrpSpPr>
+      <p:grpSpPr/>
+      <p:sp>
+        <p:nvSpPr>
+          <p:cNvPr id="2" name="TextBox 1"/>
+          <p:cNvSpPr txBox="1"/>
+          <p:nvPr/>
+        </p:nvSpPr>
+        <p:spPr>
+          <a:xfrm>
+            <a:off x="457200" y="320040"/>
+            <a:ext cx="8229600" cy="822960"/>
+          </a:xfrm>
+          <a:prstGeom prst="rect">
+            <a:avLst/>
+          </a:prstGeom>
+          <a:noFill/>
+        </p:spPr>
+        <p:txBody>
+          <a:bodyPr wrap="square">
+            <a:spAutoFit/>
+          </a:bodyPr>
+          <a:lstStyle/>
+          <a:p>
+            <a:r>
+              <a:rPr sz="2600" b="1">
+                <a:solidFill>
+                  <a:srgbClr val="0B3D2E"/>
+                </a:solidFill>
+              </a:rPr>
+              <a:t>🔗 Referencias</a:t>
+            </a:r>
+          </a:p>
+        </p:txBody>
+      </p:sp>
+      <p:sp>
+        <p:nvSpPr>
+          <p:cNvPr id="3" name="TextBox 2"/>
+          <p:cNvSpPr txBox="1"/>
+          <p:nvPr/>
+        </p:nvSpPr>
+        <p:spPr>
+          <a:xfrm>
+            <a:off x="457200" y="1280160"/>
+            <a:ext cx="8229600" cy="4937760"/>
+          </a:xfrm>
+          <a:prstGeom prst="rect">
+            <a:avLst/>
+          </a:prstGeom>
+          <a:noFill/>
+        </p:spPr>
+        <p:txBody>
+          <a:bodyPr wrap="square">
+            <a:spAutoFit/>
+          </a:bodyPr>
+          <a:lstStyle/>
+          <a:p>
+            <a:pPr>
+              <a:spcAft>
+                <a:spcPts val="600"/>
+              </a:spcAft>
+            </a:pPr>
+            <a:r>
+              <a:rPr sz="1500">
+                <a:solidFill>
+                  <a:srgbClr val="22282E"/>
+                </a:solidFill>
+              </a:rPr>
               <a:t>•  Bluetooth SIG — especificación Core y GATT: &lt;https://www.bluetooth.com/specifications/&gt;</a:t>
             </a:r>
           </a:p>
@@ -3599,6 +4035,81 @@
           </a:p>
         </p:txBody>
       </p:sp>
+    </p:spTree>
+  </p:cSld>
+  <p:clrMapOvr>
+    <a:masterClrMapping/>
+  </p:clrMapOvr>
+</p:sld>
+</file>
+
+<file path=ppt/slides/slide16.xml><?xml version="1.0" encoding="utf-8"?>
+<p:sld xmlns:a="http://schemas.openxmlformats.org/drawingml/2006/main" xmlns:p="http://schemas.openxmlformats.org/presentationml/2006/main" xmlns:r="http://schemas.openxmlformats.org/officeDocument/2006/relationships">
+  <p:cSld>
+    <p:spTree>
+      <p:nvGrpSpPr>
+        <p:cNvPr id="1" name=""/>
+        <p:cNvGrpSpPr/>
+        <p:nvPr/>
+      </p:nvGrpSpPr>
+      <p:grpSpPr/>
+      <p:sp>
+        <p:nvSpPr>
+          <p:cNvPr id="2" name="TextBox 1"/>
+          <p:cNvSpPr txBox="1"/>
+          <p:nvPr/>
+        </p:nvSpPr>
+        <p:spPr>
+          <a:xfrm>
+            <a:off x="457200" y="274320"/>
+            <a:ext cx="8229600" cy="640080"/>
+          </a:xfrm>
+          <a:prstGeom prst="rect">
+            <a:avLst/>
+          </a:prstGeom>
+          <a:noFill/>
+        </p:spPr>
+        <p:txBody>
+          <a:bodyPr wrap="square">
+            <a:spAutoFit/>
+          </a:bodyPr>
+          <a:lstStyle/>
+          <a:p>
+            <a:r>
+              <a:rPr sz="2200" b="1">
+                <a:solidFill>
+                  <a:srgbClr val="0B3D2E"/>
+                </a:solidFill>
+              </a:rPr>
+              <a:t>Diagrama de la clase</a:t>
+            </a:r>
+          </a:p>
+        </p:txBody>
+      </p:sp>
+      <p:pic>
+        <p:nvPicPr>
+          <p:cNvPr id="3" name="Picture 2" descr="abaf9762b6ded7d6.png"/>
+          <p:cNvPicPr>
+            <a:picLocks noChangeAspect="1"/>
+          </p:cNvPicPr>
+          <p:nvPr/>
+        </p:nvPicPr>
+        <p:blipFill>
+          <a:blip r:embed="rId2"/>
+          <a:stretch>
+            <a:fillRect/>
+          </a:stretch>
+        </p:blipFill>
+        <p:spPr>
+          <a:xfrm>
+            <a:off x="457200" y="2953512"/>
+            <a:ext cx="8229600" cy="1591056"/>
+          </a:xfrm>
+          <a:prstGeom prst="rect">
+            <a:avLst/>
+          </a:prstGeom>
+        </p:spPr>
+      </p:pic>
     </p:spTree>
   </p:cSld>
   <p:clrMapOvr>
@@ -3683,7 +4194,7 @@
                   <a:srgbClr val="22282E"/>
                 </a:solidFill>
               </a:rPr>
-              <a:t>•  Auditar dispositivos Bluetooth Low Energy (BLE), el protocolo inalámbrico dominante en wearables, cerraduras, sensores y gadgets IoT. El alumno entenderá la pila BLE (GAP/GATT), los modos de emparejamiento y sus debilidades, y aprenderá a escanear, enumerar servicios/características, interceptar y reproducir tramas, y manipular valores de un dispositivo propio con herramientas como bluetoothctl, gatttool, bettercap y un sniffer (nRF/Ubertooth).</a:t>
+              <a:t>•  Auditar dispositivos Bluetooth Low Energy (BLE), el protocolo inalámbrico dominante en wearables, cerraduras, sensores y gadgets IoT. El alumno entenderá la pila BLE (GAP/GATT), los modos de…</a:t>
             </a:r>
           </a:p>
         </p:txBody>
@@ -4092,7 +4603,7 @@
                   <a:srgbClr val="0B3D2E"/>
                 </a:solidFill>
               </a:rPr>
-              <a:t>📖 Definiciones y características</a:t>
+              <a:t>🧠 Explicación en profundidad</a:t>
             </a:r>
           </a:p>
         </p:txBody>
@@ -4130,82 +4641,52 @@
                   <a:srgbClr val="22282E"/>
                 </a:solidFill>
               </a:rPr>
-              <a:t>•  GAP (Generic Access Profile): define roles (central/periférico) y el advertising. Característica: controla descubrimiento y conexión.</a:t>
-            </a:r>
-          </a:p>
-          <a:p>
-            <a:pPr>
-              <a:spcAft>
-                <a:spcPts val="600"/>
-              </a:spcAft>
-            </a:pPr>
-            <a:r>
-              <a:rPr sz="1500">
-                <a:solidFill>
-                  <a:srgbClr val="22282E"/>
-                </a:solidFill>
-              </a:rPr>
-              <a:t>•  GATT (Generic Attribute Profile): organiza datos en servicios y características con handles y UUID. Característica: es la superficie funcional del dispositivo.</a:t>
-            </a:r>
-          </a:p>
-          <a:p>
-            <a:pPr>
-              <a:spcAft>
-                <a:spcPts val="600"/>
-              </a:spcAft>
-            </a:pPr>
-            <a:r>
-              <a:rPr sz="1500">
-                <a:solidFill>
-                  <a:srgbClr val="22282E"/>
-                </a:solidFill>
-              </a:rPr>
-              <a:t>•  Característica (characteristic): valor con propiedades (read/write/notify). Característica: leerla/escribirla puede cambiar el estado del dispositivo.</a:t>
-            </a:r>
-          </a:p>
-          <a:p>
-            <a:pPr>
-              <a:spcAft>
-                <a:spcPts val="600"/>
-              </a:spcAft>
-            </a:pPr>
-            <a:r>
-              <a:rPr sz="1500">
-                <a:solidFill>
-                  <a:srgbClr val="22282E"/>
-                </a:solidFill>
-              </a:rPr>
-              <a:t>•  Just Works: emparejamiento sin autenticación de usuario. Característica: vulnerable a MITM; muy común en IoT barato.</a:t>
-            </a:r>
-          </a:p>
-          <a:p>
-            <a:pPr>
-              <a:spcAft>
-                <a:spcPts val="600"/>
-              </a:spcAft>
-            </a:pPr>
-            <a:r>
-              <a:rPr sz="1500">
-                <a:solidFill>
-                  <a:srgbClr val="22282E"/>
-                </a:solidFill>
-              </a:rPr>
-              <a:t>•  nRF Connect / nRF52840 dongle: app y hardware para escanear, interactuar y sniffear BLE. Característica: accesibles y bien documentados.</a:t>
-            </a:r>
-          </a:p>
-          <a:p>
-            <a:pPr>
-              <a:spcAft>
-                <a:spcPts val="600"/>
-              </a:spcAft>
-            </a:pPr>
-            <a:r>
-              <a:rPr sz="1500">
-                <a:solidFill>
-                  <a:srgbClr val="22282E"/>
-                </a:solidFill>
-              </a:rPr>
-              <a:t>•  bettercap (módulo BLE): framework que enumera y manipula dispositivos BLE. Característica: automatiza recon y escritura de características.</a:t>
+              <a:t>•  Bluetooth Classic y BLE comparten familia, pero difieren en perfiles y uso. En BLE, advertising anuncia presencia y datos; una conexión descubre servicios y características GATT; seguridad de enlace…</a:t>
+            </a:r>
+          </a:p>
+          <a:p>
+            <a:pPr>
+              <a:spcAft>
+                <a:spcPts val="600"/>
+              </a:spcAft>
+            </a:pPr>
+            <a:r>
+              <a:rPr sz="1500">
+                <a:solidFill>
+                  <a:srgbClr val="22282E"/>
+                </a:solidFill>
+              </a:rPr>
+              <a:t>•  «Just Works» puede ser apropiado cuando no existe interfaz, pero no autentica suficientemente frente a MITM en todos los escenarios. Numeric Comparison y passkey dependen de capacidades y…</a:t>
+            </a:r>
+          </a:p>
+          <a:p>
+            <a:pPr>
+              <a:spcAft>
+                <a:spcPts val="600"/>
+              </a:spcAft>
+            </a:pPr>
+            <a:r>
+              <a:rPr sz="1500">
+                <a:solidFill>
+                  <a:srgbClr val="22282E"/>
+                </a:solidFill>
+              </a:rPr>
+              <a:t>•  Las direcciones privadas reducen seguimiento, aunque payload, ritmo, nombre y comportamiento pueden seguir correlacionando. Capturar tráfico de una conexión propia exige registrar versión, método de…</a:t>
+            </a:r>
+          </a:p>
+          <a:p>
+            <a:pPr>
+              <a:spcAft>
+                <a:spcPts val="600"/>
+              </a:spcAft>
+            </a:pPr>
+            <a:r>
+              <a:rPr sz="1500">
+                <a:solidFill>
+                  <a:srgbClr val="22282E"/>
+                </a:solidFill>
+              </a:rPr>
+              <a:t>•  Una cerradura usa enlace BLE cifrado, pero acepta el mismo comando de apertura después de conectar cualquier teléfono emparejado. Falta autorización por usuario y frescura a nivel de aplicación. Se…</a:t>
             </a:r>
           </a:p>
         </p:txBody>
@@ -4256,7 +4737,7 @@
                   <a:srgbClr val="0B3D2E"/>
                 </a:solidFill>
               </a:rPr>
-              <a:t>🧰 Herramientas y preparación</a:t>
+              <a:t>📔 Glosario operativo</a:t>
             </a:r>
           </a:p>
         </p:txBody>
@@ -4294,97 +4775,82 @@
                   <a:srgbClr val="22282E"/>
                 </a:solidFill>
               </a:rPr>
-              <a:t>•  Adaptador BLE (interno o dongle CSR/nRF), nRF52840 dongle o Ubertooth One para sniffing.</a:t>
-            </a:r>
-          </a:p>
-          <a:p>
-            <a:pPr>
-              <a:spcAft>
-                <a:spcPts val="600"/>
-              </a:spcAft>
-            </a:pPr>
-            <a:r>
-              <a:rPr sz="1500">
-                <a:solidFill>
-                  <a:srgbClr val="22282E"/>
-                </a:solidFill>
-              </a:rPr>
-              <a:t>•  BlueZ (bluetoothctl, gatttool, hcitool), bettercap, nRF Connect (móvil/desktop), Wireshark.</a:t>
-            </a:r>
-          </a:p>
-          <a:p>
-            <a:pPr>
-              <a:spcAft>
-                <a:spcPts val="600"/>
-              </a:spcAft>
-            </a:pPr>
-            <a:r>
-              <a:rPr sz="1500">
-                <a:solidFill>
-                  <a:srgbClr val="22282E"/>
-                </a:solidFill>
-              </a:rPr>
-              <a:t>•  sudo bluetoothctl</a:t>
-            </a:r>
-          </a:p>
-          <a:p>
-            <a:pPr>
-              <a:spcAft>
-                <a:spcPts val="600"/>
-              </a:spcAft>
-            </a:pPr>
-            <a:r>
-              <a:rPr sz="1500">
-                <a:solidFill>
-                  <a:srgbClr val="22282E"/>
-                </a:solidFill>
-              </a:rPr>
-              <a:t>•  [bluetooth]# scan on</a:t>
-            </a:r>
-          </a:p>
-          <a:p>
-            <a:pPr>
-              <a:spcAft>
-                <a:spcPts val="600"/>
-              </a:spcAft>
-            </a:pPr>
-            <a:r>
-              <a:rPr sz="1500">
-                <a:solidFill>
-                  <a:srgbClr val="22282E"/>
-                </a:solidFill>
-              </a:rPr>
-              <a:t>•  gatttool -b AA:BB:CC:DD:EE:FF --primary          # listar servicios</a:t>
-            </a:r>
-          </a:p>
-          <a:p>
-            <a:pPr>
-              <a:spcAft>
-                <a:spcPts val="600"/>
-              </a:spcAft>
-            </a:pPr>
-            <a:r>
-              <a:rPr sz="1500">
-                <a:solidFill>
-                  <a:srgbClr val="22282E"/>
-                </a:solidFill>
-              </a:rPr>
-              <a:t>•  gatttool -b AA:BB:CC:DD:EE:FF --characteristics  # listar características</a:t>
-            </a:r>
-          </a:p>
-          <a:p>
-            <a:pPr>
-              <a:spcAft>
-                <a:spcPts val="600"/>
-              </a:spcAft>
-            </a:pPr>
-            <a:r>
-              <a:rPr sz="1500">
-                <a:solidFill>
-                  <a:srgbClr val="22282E"/>
-                </a:solidFill>
-              </a:rPr>
-              <a:t>•  gatttool -b AA:BB:CC:DD:EE:FF --char-read -a 0x0025</a:t>
+              <a:t>•  Término — Definición útil</a:t>
+            </a:r>
+          </a:p>
+          <a:p>
+            <a:pPr>
+              <a:spcAft>
+                <a:spcPts val="600"/>
+              </a:spcAft>
+            </a:pPr>
+            <a:r>
+              <a:rPr sz="1500">
+                <a:solidFill>
+                  <a:srgbClr val="22282E"/>
+                </a:solidFill>
+              </a:rPr>
+              <a:t>•  Advertising — Emisión BLE para descubrimiento y datos breves.</a:t>
+            </a:r>
+          </a:p>
+          <a:p>
+            <a:pPr>
+              <a:spcAft>
+                <a:spcPts val="600"/>
+              </a:spcAft>
+            </a:pPr>
+            <a:r>
+              <a:rPr sz="1500">
+                <a:solidFill>
+                  <a:srgbClr val="22282E"/>
+                </a:solidFill>
+              </a:rPr>
+              <a:t>•  GATT — Modelo de servicios, características y operaciones BLE.</a:t>
+            </a:r>
+          </a:p>
+          <a:p>
+            <a:pPr>
+              <a:spcAft>
+                <a:spcPts val="600"/>
+              </a:spcAft>
+            </a:pPr>
+            <a:r>
+              <a:rPr sz="1500">
+                <a:solidFill>
+                  <a:srgbClr val="22282E"/>
+                </a:solidFill>
+              </a:rPr>
+              <a:t>•  Pairing — Proceso que establece parámetros y claves de seguridad.</a:t>
+            </a:r>
+          </a:p>
+          <a:p>
+            <a:pPr>
+              <a:spcAft>
+                <a:spcPts val="600"/>
+              </a:spcAft>
+            </a:pPr>
+            <a:r>
+              <a:rPr sz="1500">
+                <a:solidFill>
+                  <a:srgbClr val="22282E"/>
+                </a:solidFill>
+              </a:rPr>
+              <a:t>•  Bonding — Conservación de claves para conexiones futuras.</a:t>
+            </a:r>
+          </a:p>
+          <a:p>
+            <a:pPr>
+              <a:spcAft>
+                <a:spcPts val="600"/>
+              </a:spcAft>
+            </a:pPr>
+            <a:r>
+              <a:rPr sz="1500">
+                <a:solidFill>
+                  <a:srgbClr val="22282E"/>
+                </a:solidFill>
+              </a:rPr>
+              <a:t>•  Dirección privada — Dirección que rota para reducir seguimiento, con límites.</a:t>
             </a:r>
           </a:p>
         </p:txBody>
@@ -4435,7 +4901,7 @@
                   <a:srgbClr val="0B3D2E"/>
                 </a:solidFill>
               </a:rPr>
-              <a:t>🧪 Laboratorio guiado</a:t>
+              <a:t>✅ Criterio de dominio</a:t>
             </a:r>
           </a:p>
         </p:txBody>
@@ -4473,97 +4939,7 @@
                   <a:srgbClr val="22282E"/>
                 </a:solidFill>
               </a:rPr>
-              <a:t>•  Escanea con bluetoothctl scan on o bettercap ble.recon on y localiza tu dispositivo BLE propio.</a:t>
-            </a:r>
-          </a:p>
-          <a:p>
-            <a:pPr>
-              <a:spcAft>
-                <a:spcPts val="600"/>
-              </a:spcAft>
-            </a:pPr>
-            <a:r>
-              <a:rPr sz="1500">
-                <a:solidFill>
-                  <a:srgbClr val="22282E"/>
-                </a:solidFill>
-              </a:rPr>
-              <a:t>•  Enumera GATT: con gatttool o nRF Connect lista servicios y características, anotando handles, UUID y propiedades (read/write/notify).</a:t>
-            </a:r>
-          </a:p>
-          <a:p>
-            <a:pPr>
-              <a:spcAft>
-                <a:spcPts val="600"/>
-              </a:spcAft>
-            </a:pPr>
-            <a:r>
-              <a:rPr sz="1500">
-                <a:solidFill>
-                  <a:srgbClr val="22282E"/>
-                </a:solidFill>
-              </a:rPr>
-              <a:t>•  Lee valores: lee características legibles y correlaciona con el estado del dispositivo (p. ej. nivel de batería).</a:t>
-            </a:r>
-          </a:p>
-          <a:p>
-            <a:pPr>
-              <a:spcAft>
-                <a:spcPts val="600"/>
-              </a:spcAft>
-            </a:pPr>
-            <a:r>
-              <a:rPr sz="1500">
-                <a:solidFill>
-                  <a:srgbClr val="22282E"/>
-                </a:solidFill>
-              </a:rPr>
-              <a:t>•  Escribe valores: en tu dispositivo propio, escribe una característica de control y observa el efecto (encender/apagar, cambiar color).</a:t>
-            </a:r>
-          </a:p>
-          <a:p>
-            <a:pPr>
-              <a:spcAft>
-                <a:spcPts val="600"/>
-              </a:spcAft>
-            </a:pPr>
-            <a:r>
-              <a:rPr sz="1500">
-                <a:solidFill>
-                  <a:srgbClr val="22282E"/>
-                </a:solidFill>
-              </a:rPr>
-              <a:t>•  Habilita notificaciones: suscríbete a una característica notify y captura los eventos.</a:t>
-            </a:r>
-          </a:p>
-          <a:p>
-            <a:pPr>
-              <a:spcAft>
-                <a:spcPts val="600"/>
-              </a:spcAft>
-            </a:pPr>
-            <a:r>
-              <a:rPr sz="1500">
-                <a:solidFill>
-                  <a:srgbClr val="22282E"/>
-                </a:solidFill>
-              </a:rPr>
-              <a:t>•  Sniff: con el nRF52840/Ubertooth captura una conexión y ábrela en Wireshark; comprueba si el enlace está cifrado.</a:t>
-            </a:r>
-          </a:p>
-          <a:p>
-            <a:pPr>
-              <a:spcAft>
-                <a:spcPts val="600"/>
-              </a:spcAft>
-            </a:pPr>
-            <a:r>
-              <a:rPr sz="1500">
-                <a:solidFill>
-                  <a:srgbClr val="22282E"/>
-                </a:solidFill>
-              </a:rPr>
-              <a:t>•  Replay: si el dispositivo acepta comandos sin autenticación, reproduce una escritura capturada para demostrar el impacto.</a:t>
+              <a:t>•  El alumno domina BLE cuando separa descubrimiento, enlace y autorización, identifica el método de pairing, prueba solo periféricos propios y propone protección contextual para una característica…</a:t>
             </a:r>
           </a:p>
         </p:txBody>
@@ -4614,7 +4990,7 @@
                   <a:srgbClr val="0B3D2E"/>
                 </a:solidFill>
               </a:rPr>
-              <a:t>✍️ Ejercicios</a:t>
+              <a:t>📖 Definiciones y características</a:t>
             </a:r>
           </a:p>
         </p:txBody>
@@ -4652,82 +5028,82 @@
                   <a:srgbClr val="22282E"/>
                 </a:solidFill>
               </a:rPr>
-              <a:t>•  Enumera todos los servicios y características de un dispositivo BLE propio.</a:t>
-            </a:r>
-          </a:p>
-          <a:p>
-            <a:pPr>
-              <a:spcAft>
-                <a:spcPts val="600"/>
-              </a:spcAft>
-            </a:pPr>
-            <a:r>
-              <a:rPr sz="1500">
-                <a:solidFill>
-                  <a:srgbClr val="22282E"/>
-                </a:solidFill>
-              </a:rPr>
-              <a:t>•  Identifica qué característica controla una función concreta.</a:t>
-            </a:r>
-          </a:p>
-          <a:p>
-            <a:pPr>
-              <a:spcAft>
-                <a:spcPts val="600"/>
-              </a:spcAft>
-            </a:pPr>
-            <a:r>
-              <a:rPr sz="1500">
-                <a:solidFill>
-                  <a:srgbClr val="22282E"/>
-                </a:solidFill>
-              </a:rPr>
-              <a:t>•  Cambia el estado del dispositivo escribiendo una característica.</a:t>
-            </a:r>
-          </a:p>
-          <a:p>
-            <a:pPr>
-              <a:spcAft>
-                <a:spcPts val="600"/>
-              </a:spcAft>
-            </a:pPr>
-            <a:r>
-              <a:rPr sz="1500">
-                <a:solidFill>
-                  <a:srgbClr val="22282E"/>
-                </a:solidFill>
-              </a:rPr>
-              <a:t>•  Captura tráfico BLE y determina si el emparejamiento usa Just Works.</a:t>
-            </a:r>
-          </a:p>
-          <a:p>
-            <a:pPr>
-              <a:spcAft>
-                <a:spcPts val="600"/>
-              </a:spcAft>
-            </a:pPr>
-            <a:r>
-              <a:rPr sz="1500">
-                <a:solidFill>
-                  <a:srgbClr val="22282E"/>
-                </a:solidFill>
-              </a:rPr>
-              <a:t>•  Suscríbete a notificaciones y registra tres eventos.</a:t>
-            </a:r>
-          </a:p>
-          <a:p>
-            <a:pPr>
-              <a:spcAft>
-                <a:spcPts val="600"/>
-              </a:spcAft>
-            </a:pPr>
-            <a:r>
-              <a:rPr sz="1500">
-                <a:solidFill>
-                  <a:srgbClr val="22282E"/>
-                </a:solidFill>
-              </a:rPr>
-              <a:t>•  Enumera las debilidades del dispositivo (falta de cifrado/autorización).</a:t>
+              <a:t>•  GAP (Generic Access Profile): define roles (central/periférico) y el advertising. Característica: controla descubrimiento y conexión.</a:t>
+            </a:r>
+          </a:p>
+          <a:p>
+            <a:pPr>
+              <a:spcAft>
+                <a:spcPts val="600"/>
+              </a:spcAft>
+            </a:pPr>
+            <a:r>
+              <a:rPr sz="1500">
+                <a:solidFill>
+                  <a:srgbClr val="22282E"/>
+                </a:solidFill>
+              </a:rPr>
+              <a:t>•  GATT (Generic Attribute Profile): organiza datos en servicios y características con handles y UUID. Característica: es la superficie funcional del dispositivo.</a:t>
+            </a:r>
+          </a:p>
+          <a:p>
+            <a:pPr>
+              <a:spcAft>
+                <a:spcPts val="600"/>
+              </a:spcAft>
+            </a:pPr>
+            <a:r>
+              <a:rPr sz="1500">
+                <a:solidFill>
+                  <a:srgbClr val="22282E"/>
+                </a:solidFill>
+              </a:rPr>
+              <a:t>•  Característica (characteristic): valor con propiedades (read/write/notify). Característica: leerla/escribirla puede cambiar el estado del dispositivo.</a:t>
+            </a:r>
+          </a:p>
+          <a:p>
+            <a:pPr>
+              <a:spcAft>
+                <a:spcPts val="600"/>
+              </a:spcAft>
+            </a:pPr>
+            <a:r>
+              <a:rPr sz="1500">
+                <a:solidFill>
+                  <a:srgbClr val="22282E"/>
+                </a:solidFill>
+              </a:rPr>
+              <a:t>•  Just Works: emparejamiento sin autenticación de usuario. Característica: vulnerable a MITM; muy común en IoT barato.</a:t>
+            </a:r>
+          </a:p>
+          <a:p>
+            <a:pPr>
+              <a:spcAft>
+                <a:spcPts val="600"/>
+              </a:spcAft>
+            </a:pPr>
+            <a:r>
+              <a:rPr sz="1500">
+                <a:solidFill>
+                  <a:srgbClr val="22282E"/>
+                </a:solidFill>
+              </a:rPr>
+              <a:t>•  nRF Connect / nRF52840 dongle: app y hardware para escanear, interactuar y sniffear BLE. Característica: accesibles y bien documentados.</a:t>
+            </a:r>
+          </a:p>
+          <a:p>
+            <a:pPr>
+              <a:spcAft>
+                <a:spcPts val="600"/>
+              </a:spcAft>
+            </a:pPr>
+            <a:r>
+              <a:rPr sz="1500">
+                <a:solidFill>
+                  <a:srgbClr val="22282E"/>
+                </a:solidFill>
+              </a:rPr>
+              <a:t>•  bettercap (módulo BLE): framework que enumera y manipula dispositivos BLE. Característica: automatiza recon y escritura de características.</a:t>
             </a:r>
           </a:p>
         </p:txBody>
@@ -4778,7 +5154,7 @@
                   <a:srgbClr val="0B3D2E"/>
                 </a:solidFill>
               </a:rPr>
-              <a:t>📝 Reto verificable</a:t>
+              <a:t>🧰 Herramientas y preparación</a:t>
             </a:r>
           </a:p>
         </p:txBody>
@@ -4816,7 +5192,22 @@
                   <a:srgbClr val="22282E"/>
                 </a:solidFill>
               </a:rPr>
-              <a:t>•  Toma un dispositivo BLE propio (p. ej. una bombilla o candado de juguete) y demuestra control no autenticado: identifica la característica de control y modifícala para cambiar su estado sin usar la app oficial. Criterio de aceptación: documentas el handle/UUID exacto, el valor escrito y evidencia del cambio físico, y concluyes si el dispositivo protege o no sus comandos.</a:t>
+              <a:t>•  Adaptador BLE (interno o dongle CSR/nRF), nRF52840 dongle o Ubertooth One para sniffing.</a:t>
+            </a:r>
+          </a:p>
+          <a:p>
+            <a:pPr>
+              <a:spcAft>
+                <a:spcPts val="600"/>
+              </a:spcAft>
+            </a:pPr>
+            <a:r>
+              <a:rPr sz="1500">
+                <a:solidFill>
+                  <a:srgbClr val="22282E"/>
+                </a:solidFill>
+              </a:rPr>
+              <a:t>•  BlueZ (bluetoothctl, gatttool, hcitool), bettercap, nRF Connect (móvil/desktop), Wireshark.</a:t>
             </a:r>
           </a:p>
         </p:txBody>
